--- a/deliverables/adrabetadex_provider_net_cost_calculator.pptx
+++ b/deliverables/adrabetadex_provider_net_cost_calculator.pptx
@@ -4,6 +4,9 @@
   <p:sldMasterIdLst>
     <p:sldMasterId id="2147483648" r:id="rId1"/>
   </p:sldMasterIdLst>
+  <p:notesMasterIdLst>
+    <p:notesMasterId r:id="rId11"/>
+  </p:notesMasterIdLst>
   <p:sldIdLst>
     <p:sldId id="256" r:id="rId2"/>
     <p:sldId id="257" r:id="rId3"/>
@@ -15,9 +18,6 @@
     <p:sldId id="263" r:id="rId9"/>
     <p:sldId id="264" r:id="rId10"/>
   </p:sldIdLst>
-  <p:notesMasterIdLst>
-    <p:notesMasterId r:id="rId11"/>
-  </p:notesMasterIdLst>
   <p:sldSz cx="12192000" cy="6858000"/>
   <p:notesSz cx="6858000" cy="12192000"/>
   <p:defaultTextStyle>
@@ -112,6 +112,11 @@
       </a:defRPr>
     </a:lvl9pPr>
   </p:defaultTextStyle>
+  <p:extLst>
+    <p:ext uri="{EFAFB233-063F-42B5-8137-9DF3F51BA10A}">
+      <p15:sldGuideLst xmlns:p15="http://schemas.microsoft.com/office/powerpoint/2012/main"/>
+    </p:ext>
+  </p:extLst>
 </p:presentation>
 </file>
 
@@ -137,234 +142,10 @@
           <a:chExt cx="0" cy="0"/>
         </a:xfrm>
       </p:grpSpPr>
-      <p:sp>
-        <p:nvSpPr>
-          <p:cNvPr id="2" name="Header Placeholder 1"/>
-          <p:cNvSpPr>
-            <a:spLocks noGrp="1"/>
-          </p:cNvSpPr>
-          <p:nvPr>
-            <p:ph type="hdr" sz="quarter"/>
-          </p:nvPr>
-        </p:nvSpPr>
-        <p:spPr>
-          <a:xfrm>
-            <a:off x="0" y="0"/>
-            <a:ext cx="2971800" cy="458788"/>
-          </a:xfrm>
-          <a:prstGeom prst="rect">
-            <a:avLst/>
-          </a:prstGeom>
-        </p:spPr>
-        <p:txBody>
-          <a:bodyPr vert="horz" lIns="91440" tIns="45720" rIns="91440" bIns="45720" rtlCol="0"/>
-          <a:lstStyle>
-            <a:lvl1pPr algn="l">
-              <a:defRPr sz="1200"/>
-            </a:lvl1pPr>
-          </a:lstStyle>
-          <a:p>
-            <a:endParaRPr lang="en-US"/>
-          </a:p>
-        </p:txBody>
-      </p:sp>
-      <p:sp>
-        <p:nvSpPr>
-          <p:cNvPr id="3" name="Date Placeholder 2"/>
-          <p:cNvSpPr>
-            <a:spLocks noGrp="1"/>
-          </p:cNvSpPr>
-          <p:nvPr>
-            <p:ph type="dt" idx="1"/>
-          </p:nvPr>
-        </p:nvSpPr>
-        <p:spPr>
-          <a:xfrm>
-            <a:off x="3884613" y="0"/>
-            <a:ext cx="2971800" cy="458788"/>
-          </a:xfrm>
-          <a:prstGeom prst="rect">
-            <a:avLst/>
-          </a:prstGeom>
-        </p:spPr>
-        <p:txBody>
-          <a:bodyPr vert="horz" lIns="91440" tIns="45720" rIns="91440" bIns="45720" rtlCol="0"/>
-          <a:lstStyle>
-            <a:lvl1pPr algn="r">
-              <a:defRPr sz="1200"/>
-            </a:lvl1pPr>
-          </a:lstStyle>
-          <a:p>
-            <a:fld id="{5282F153-3F37-0F45-9E97-73ACFA13230C}" type="datetimeFigureOut">
-              <a:rPr lang="en-US"/>
-              <a:t>7/23/19</a:t>
-            </a:fld>
-            <a:endParaRPr lang="en-US"/>
-          </a:p>
-        </p:txBody>
-      </p:sp>
-      <p:sp>
-        <p:nvSpPr>
-          <p:cNvPr id="4" name="Slide Image Placeholder 3"/>
-          <p:cNvSpPr>
-            <a:spLocks noGrp="1" noRot="1" noChangeAspect="1"/>
-          </p:cNvSpPr>
-          <p:nvPr>
-            <p:ph type="sldImg" idx="2"/>
-          </p:nvPr>
-        </p:nvSpPr>
-        <p:spPr>
-          <a:xfrm>
-            <a:off x="685800" y="1143000"/>
-            <a:ext cx="5486400" cy="3086100"/>
-          </a:xfrm>
-          <a:prstGeom prst="rect">
-            <a:avLst/>
-          </a:prstGeom>
-          <a:noFill/>
-          <a:ln w="12700">
-            <a:solidFill>
-              <a:prstClr val="black"/>
-            </a:solidFill>
-          </a:ln>
-        </p:spPr>
-        <p:txBody>
-          <a:bodyPr vert="horz" lIns="91440" tIns="45720" rIns="91440" bIns="45720" rtlCol="0" anchor="ctr"/>
-          <a:lstStyle/>
-          <a:p>
-            <a:endParaRPr lang="en-US"/>
-          </a:p>
-        </p:txBody>
-      </p:sp>
-      <p:sp>
-        <p:nvSpPr>
-          <p:cNvPr id="5" name="Notes Placeholder 4"/>
-          <p:cNvSpPr>
-            <a:spLocks noGrp="1"/>
-          </p:cNvSpPr>
-          <p:nvPr>
-            <p:ph type="body" sz="quarter" idx="3"/>
-          </p:nvPr>
-        </p:nvSpPr>
-        <p:spPr>
-          <a:xfrm>
-            <a:off x="685800" y="4400550"/>
-            <a:ext cx="5486400" cy="3600450"/>
-          </a:xfrm>
-          <a:prstGeom prst="rect">
-            <a:avLst/>
-          </a:prstGeom>
-        </p:spPr>
-        <p:txBody>
-          <a:bodyPr vert="horz" lIns="91440" tIns="45720" rIns="91440" bIns="45720" rtlCol="0"/>
-          <a:lstStyle/>
-          <a:p>
-            <a:pPr lvl="0"/>
-            <a:r>
-              <a:rPr lang="en-US"/>
-              <a:t>Click to edit Master text styles</a:t>
-            </a:r>
-          </a:p>
-          <a:p>
-            <a:pPr lvl="1"/>
-            <a:r>
-              <a:rPr lang="en-US"/>
-              <a:t>Second level</a:t>
-            </a:r>
-          </a:p>
-          <a:p>
-            <a:pPr lvl="2"/>
-            <a:r>
-              <a:rPr lang="en-US"/>
-              <a:t>Third level</a:t>
-            </a:r>
-          </a:p>
-          <a:p>
-            <a:pPr lvl="3"/>
-            <a:r>
-              <a:rPr lang="en-US"/>
-              <a:t>Fourth level</a:t>
-            </a:r>
-          </a:p>
-          <a:p>
-            <a:pPr lvl="4"/>
-            <a:r>
-              <a:rPr lang="en-US"/>
-              <a:t>Fifth level</a:t>
-            </a:r>
-          </a:p>
-        </p:txBody>
-      </p:sp>
-      <p:sp>
-        <p:nvSpPr>
-          <p:cNvPr id="6" name="Footer Placeholder 5"/>
-          <p:cNvSpPr>
-            <a:spLocks noGrp="1"/>
-          </p:cNvSpPr>
-          <p:nvPr>
-            <p:ph type="ftr" sz="quarter" idx="4"/>
-          </p:nvPr>
-        </p:nvSpPr>
-        <p:spPr>
-          <a:xfrm>
-            <a:off x="0" y="8685213"/>
-            <a:ext cx="2971800" cy="458787"/>
-          </a:xfrm>
-          <a:prstGeom prst="rect">
-            <a:avLst/>
-          </a:prstGeom>
-        </p:spPr>
-        <p:txBody>
-          <a:bodyPr vert="horz" lIns="91440" tIns="45720" rIns="91440" bIns="45720" rtlCol="0" anchor="b"/>
-          <a:lstStyle>
-            <a:lvl1pPr algn="l">
-              <a:defRPr sz="1200"/>
-            </a:lvl1pPr>
-          </a:lstStyle>
-          <a:p>
-            <a:endParaRPr lang="en-US"/>
-          </a:p>
-        </p:txBody>
-      </p:sp>
-      <p:sp>
-        <p:nvSpPr>
-          <p:cNvPr id="7" name="Slide Number Placeholder 6"/>
-          <p:cNvSpPr>
-            <a:spLocks noGrp="1"/>
-          </p:cNvSpPr>
-          <p:nvPr>
-            <p:ph type="sldNum" sz="quarter" idx="5"/>
-          </p:nvPr>
-        </p:nvSpPr>
-        <p:spPr>
-          <a:xfrm>
-            <a:off x="3884613" y="8685213"/>
-            <a:ext cx="2971800" cy="458787"/>
-          </a:xfrm>
-          <a:prstGeom prst="rect">
-            <a:avLst/>
-          </a:prstGeom>
-        </p:spPr>
-        <p:txBody>
-          <a:bodyPr vert="horz" lIns="91440" tIns="45720" rIns="91440" bIns="45720" rtlCol="0" anchor="b"/>
-          <a:lstStyle>
-            <a:lvl1pPr algn="r">
-              <a:defRPr sz="1200"/>
-            </a:lvl1pPr>
-          </a:lstStyle>
-          <a:p>
-            <a:fld id="{CE5E9CC1-C706-0F49-92D6-E571CC5EEA8F}" type="slidenum">
-              <a:rPr lang="en-US"/>
-              <a:t>‹#›</a:t>
-            </a:fld>
-            <a:endParaRPr lang="en-US"/>
-          </a:p>
-        </p:txBody>
-      </p:sp>
     </p:spTree>
     <p:extLst>
       <p:ext uri="{BB962C8B-B14F-4D97-AF65-F5344CB8AC3E}">
-        <p14:creationId xmlns:p14="http://schemas.microsoft.com/office/powerpoint/2010/main" val="1024086991"/>
+        <p14:creationId xmlns:p14="http://schemas.microsoft.com/office/powerpoint/2010/main" val="3896357928"/>
       </p:ext>
     </p:extLst>
   </p:cSld>
@@ -508,10 +289,6 @@
           <a:bodyPr/>
           <a:lstStyle/>
           <a:p>
-            <a:r>
-              <a:rPr lang="en-US" dirty="0"/>
-              <a:t/>
-            </a:r>
             <a:endParaRPr lang="en-US" dirty="0"/>
           </a:p>
         </p:txBody>
@@ -596,10 +373,6 @@
           <a:bodyPr/>
           <a:lstStyle/>
           <a:p>
-            <a:r>
-              <a:rPr lang="en-US" dirty="0"/>
-              <a:t/>
-            </a:r>
             <a:endParaRPr lang="en-US" dirty="0"/>
           </a:p>
         </p:txBody>
@@ -684,10 +457,6 @@
           <a:bodyPr/>
           <a:lstStyle/>
           <a:p>
-            <a:r>
-              <a:rPr lang="en-US" dirty="0"/>
-              <a:t/>
-            </a:r>
             <a:endParaRPr lang="en-US" dirty="0"/>
           </a:p>
         </p:txBody>
@@ -772,10 +541,6 @@
           <a:bodyPr/>
           <a:lstStyle/>
           <a:p>
-            <a:r>
-              <a:rPr lang="en-US" dirty="0"/>
-              <a:t/>
-            </a:r>
             <a:endParaRPr lang="en-US" dirty="0"/>
           </a:p>
         </p:txBody>
@@ -860,10 +625,6 @@
           <a:bodyPr/>
           <a:lstStyle/>
           <a:p>
-            <a:r>
-              <a:rPr lang="en-US" dirty="0"/>
-              <a:t/>
-            </a:r>
             <a:endParaRPr lang="en-US" dirty="0"/>
           </a:p>
         </p:txBody>
@@ -948,10 +709,6 @@
           <a:bodyPr/>
           <a:lstStyle/>
           <a:p>
-            <a:r>
-              <a:rPr lang="en-US" dirty="0"/>
-              <a:t/>
-            </a:r>
             <a:endParaRPr lang="en-US" dirty="0"/>
           </a:p>
         </p:txBody>
@@ -1036,10 +793,6 @@
           <a:bodyPr/>
           <a:lstStyle/>
           <a:p>
-            <a:r>
-              <a:rPr lang="en-US" dirty="0"/>
-              <a:t/>
-            </a:r>
             <a:endParaRPr lang="en-US" dirty="0"/>
           </a:p>
         </p:txBody>
@@ -1124,10 +877,6 @@
           <a:bodyPr/>
           <a:lstStyle/>
           <a:p>
-            <a:r>
-              <a:rPr lang="en-US" dirty="0"/>
-              <a:t/>
-            </a:r>
             <a:endParaRPr lang="en-US" dirty="0"/>
           </a:p>
         </p:txBody>
@@ -1212,10 +961,6 @@
           <a:bodyPr/>
           <a:lstStyle/>
           <a:p>
-            <a:r>
-              <a:rPr lang="en-US" dirty="0"/>
-              <a:t/>
-            </a:r>
             <a:endParaRPr lang="en-US" dirty="0"/>
           </a:p>
         </p:txBody>
@@ -1289,6 +1034,11 @@
 <file path=ppt/slideMasters/slideMaster1.xml><?xml version="1.0" encoding="utf-8"?>
 <p:sldMaster xmlns:a="http://schemas.openxmlformats.org/drawingml/2006/main" xmlns:r="http://schemas.openxmlformats.org/officeDocument/2006/relationships" xmlns:p="http://schemas.openxmlformats.org/presentationml/2006/main">
   <p:cSld>
+    <p:bg>
+      <p:bgRef idx="1001">
+        <a:schemeClr val="bg1"/>
+      </p:bgRef>
+    </p:bg>
     <p:spTree>
       <p:nvGrpSpPr>
         <p:cNvPr id="1" name=""/>
@@ -1571,6 +1321,7 @@
         <a:solidFill>
           <a:srgbClr val="FAFAF7"/>
         </a:solidFill>
+        <a:effectLst/>
       </p:bgPr>
     </p:bg>
     <p:spTree>
@@ -1589,14 +1340,14 @@
       </p:grpSpPr>
       <p:pic>
         <p:nvPicPr>
-          <p:cNvPr id="2" name="Image 0" descr="/Users/josephstewart/Documents/JLPolicyConsulting/tmp/adrabetadex_deck/assets/navisync_logo_crop.png">    </p:cNvPr>
+          <p:cNvPr id="2" name="Image 0" descr="/Users/josephstewart/Documents/JLPolicyConsulting/tmp/adrabetadex_deck/assets/navisync_logo_crop.png"/>
           <p:cNvPicPr>
             <a:picLocks noChangeAspect="1"/>
           </p:cNvPicPr>
           <p:nvPr/>
         </p:nvPicPr>
         <p:blipFill>
-          <a:blip r:embed="rId1"/>
+          <a:blip r:embed="rId3"/>
           <a:stretch>
             <a:fillRect/>
           </a:stretch>
@@ -1632,7 +1383,7 @@
           <a:bodyPr wrap="square" lIns="0" tIns="0" rIns="0" bIns="0" rtlCol="0" anchor="ctr"/>
           <a:lstStyle/>
           <a:p>
-            <a:pPr indent="0" marL="0">
+            <a:pPr marL="0" indent="0">
               <a:buNone/>
             </a:pPr>
             <a:r>
@@ -1658,7 +1409,7 @@
         </p:nvSpPr>
         <p:spPr>
           <a:xfrm>
-            <a:off x="1444752" y="1481328"/>
+            <a:off x="2450592" y="1463040"/>
             <a:ext cx="8595360" cy="658368"/>
           </a:xfrm>
           <a:prstGeom prst="rect">
@@ -1671,7 +1422,7 @@
           <a:bodyPr wrap="square" lIns="0" tIns="0" rIns="0" bIns="0" rtlCol="0" anchor="ctr"/>
           <a:lstStyle/>
           <a:p>
-            <a:pPr indent="0" marL="0">
+            <a:pPr marL="0" indent="0">
               <a:buNone/>
             </a:pPr>
             <a:r>
@@ -1697,7 +1448,7 @@
         </p:nvSpPr>
         <p:spPr>
           <a:xfrm>
-            <a:off x="1444752" y="2176272"/>
+            <a:off x="2734056" y="2016252"/>
             <a:ext cx="7498080" cy="384048"/>
           </a:xfrm>
           <a:prstGeom prst="rect">
@@ -1710,7 +1461,7 @@
           <a:bodyPr wrap="square" lIns="0" tIns="0" rIns="0" bIns="0" rtlCol="0" anchor="ctr"/>
           <a:lstStyle/>
           <a:p>
-            <a:pPr indent="0" marL="0">
+            <a:pPr marL="0" indent="0">
               <a:buNone/>
             </a:pPr>
             <a:r>
@@ -1749,7 +1500,7 @@
           <a:bodyPr wrap="square" lIns="0" tIns="0" rIns="0" bIns="0" rtlCol="0" anchor="ctr"/>
           <a:lstStyle/>
           <a:p>
-            <a:pPr indent="0" marL="0">
+            <a:pPr marL="0" indent="0">
               <a:buNone/>
             </a:pPr>
             <a:r>
@@ -1788,7 +1539,7 @@
           <a:bodyPr wrap="square" lIns="0" tIns="0" rIns="0" bIns="0" rtlCol="0" anchor="ctr"/>
           <a:lstStyle/>
           <a:p>
-            <a:pPr indent="0" marL="0">
+            <a:pPr marL="0" indent="0">
               <a:buNone/>
             </a:pPr>
             <a:r>
@@ -1854,7 +1605,7 @@
           <a:bodyPr wrap="square" lIns="0" tIns="0" rIns="0" bIns="0" rtlCol="0" anchor="ctr"/>
           <a:lstStyle/>
           <a:p>
-            <a:pPr algn="l" indent="0" marL="0">
+            <a:pPr marL="0" indent="0" algn="l">
               <a:buNone/>
             </a:pPr>
             <a:r>
@@ -1920,7 +1671,7 @@
           <a:bodyPr wrap="square" lIns="0" tIns="0" rIns="0" bIns="0" rtlCol="0" anchor="ctr"/>
           <a:lstStyle/>
           <a:p>
-            <a:pPr algn="l" indent="0" marL="0">
+            <a:pPr marL="0" indent="0" algn="l">
               <a:buNone/>
             </a:pPr>
             <a:r>
@@ -1986,7 +1737,7 @@
           <a:bodyPr wrap="square" lIns="0" tIns="0" rIns="0" bIns="0" rtlCol="0" anchor="ctr"/>
           <a:lstStyle/>
           <a:p>
-            <a:pPr algn="l" indent="0" marL="0">
+            <a:pPr marL="0" indent="0" algn="l">
               <a:buNone/>
             </a:pPr>
             <a:r>
@@ -2052,7 +1803,7 @@
           <a:bodyPr wrap="square" lIns="0" tIns="0" rIns="0" bIns="0" rtlCol="0" anchor="ctr"/>
           <a:lstStyle/>
           <a:p>
-            <a:pPr algn="l" indent="0" marL="0">
+            <a:pPr marL="0" indent="0" algn="l">
               <a:buNone/>
             </a:pPr>
             <a:r>
@@ -2190,7 +1941,7 @@
           <a:bodyPr wrap="square" lIns="0" tIns="0" rIns="0" bIns="0" rtlCol="0" anchor="ctr"/>
           <a:lstStyle/>
           <a:p>
-            <a:pPr algn="ctr" indent="0" marL="0">
+            <a:pPr marL="0" indent="0" algn="ctr">
               <a:buNone/>
             </a:pPr>
             <a:r>
@@ -2207,7 +1958,7 @@
             <a:endParaRPr lang="en-US" sz="1140" dirty="0"/>
           </a:p>
           <a:p>
-            <a:pPr algn="ctr" indent="0" marL="0">
+            <a:pPr marL="0" indent="0" algn="ctr">
               <a:buNone/>
             </a:pPr>
             <a:r>
@@ -2273,7 +2024,7 @@
           <a:bodyPr wrap="square" lIns="0" tIns="0" rIns="0" bIns="0" rtlCol="0" anchor="ctr"/>
           <a:lstStyle/>
           <a:p>
-            <a:pPr algn="ctr" indent="0" marL="0">
+            <a:pPr marL="0" indent="0" algn="ctr">
               <a:buNone/>
             </a:pPr>
             <a:r>
@@ -2290,7 +2041,7 @@
             <a:endParaRPr lang="en-US" sz="1140" dirty="0"/>
           </a:p>
           <a:p>
-            <a:pPr algn="ctr" indent="0" marL="0">
+            <a:pPr marL="0" indent="0" algn="ctr">
               <a:buNone/>
             </a:pPr>
             <a:r>
@@ -2356,7 +2107,7 @@
           <a:bodyPr wrap="square" lIns="0" tIns="0" rIns="0" bIns="0" rtlCol="0" anchor="ctr"/>
           <a:lstStyle/>
           <a:p>
-            <a:pPr algn="ctr" indent="0" marL="0">
+            <a:pPr marL="0" indent="0" algn="ctr">
               <a:buNone/>
             </a:pPr>
             <a:r>
@@ -2373,7 +2124,7 @@
             <a:endParaRPr lang="en-US" sz="1140" dirty="0"/>
           </a:p>
           <a:p>
-            <a:pPr algn="ctr" indent="0" marL="0">
+            <a:pPr marL="0" indent="0" algn="ctr">
               <a:buNone/>
             </a:pPr>
             <a:r>
@@ -2412,7 +2163,7 @@
           <a:bodyPr wrap="square" lIns="0" tIns="0" rIns="0" bIns="0" rtlCol="0" anchor="ctr"/>
           <a:lstStyle/>
           <a:p>
-            <a:pPr indent="0" marL="0">
+            <a:pPr marL="0" indent="0">
               <a:buNone/>
             </a:pPr>
             <a:r>
@@ -2504,6 +2255,7 @@
         <a:solidFill>
           <a:srgbClr val="FAFAF7"/>
         </a:solidFill>
+        <a:effectLst/>
       </p:bgPr>
     </p:bg>
     <p:spTree>
@@ -2541,7 +2293,7 @@
           <a:bodyPr wrap="square" lIns="0" tIns="0" rIns="0" bIns="0" rtlCol="0" anchor="ctr"/>
           <a:lstStyle/>
           <a:p>
-            <a:pPr indent="0" marL="0">
+            <a:pPr marL="0" indent="0">
               <a:buNone/>
             </a:pPr>
             <a:r>
@@ -2603,7 +2355,7 @@
           <a:bodyPr wrap="square" lIns="0" tIns="0" rIns="0" bIns="0" rtlCol="0" anchor="ctr"/>
           <a:lstStyle/>
           <a:p>
-            <a:pPr algn="r" indent="0" marL="0">
+            <a:pPr marL="0" indent="0" algn="r">
               <a:buNone/>
             </a:pPr>
             <a:r>
@@ -2700,7 +2452,7 @@
           <a:bodyPr wrap="square" lIns="0" tIns="0" rIns="0" bIns="0" rtlCol="0" anchor="ctr"/>
           <a:lstStyle/>
           <a:p>
-            <a:pPr indent="0" marL="0">
+            <a:pPr marL="0" indent="0">
               <a:buNone/>
             </a:pPr>
             <a:r>
@@ -2739,7 +2491,7 @@
           <a:bodyPr wrap="square" lIns="0" tIns="0" rIns="0" bIns="0" rtlCol="0" anchor="ctr"/>
           <a:lstStyle/>
           <a:p>
-            <a:pPr indent="0" marL="0">
+            <a:pPr marL="0" indent="0">
               <a:buNone/>
             </a:pPr>
             <a:r>
@@ -2917,7 +2669,7 @@
           <a:bodyPr wrap="square" lIns="0" tIns="0" rIns="0" bIns="0" rtlCol="0" anchor="ctr"/>
           <a:lstStyle/>
           <a:p>
-            <a:pPr algn="ctr" indent="0" marL="0">
+            <a:pPr marL="0" indent="0" algn="ctr">
               <a:buNone/>
             </a:pPr>
             <a:r>
@@ -2983,7 +2735,7 @@
           <a:bodyPr wrap="square" lIns="0" tIns="0" rIns="0" bIns="0" rtlCol="0" anchor="ctr"/>
           <a:lstStyle/>
           <a:p>
-            <a:pPr algn="ctr" indent="0" marL="0">
+            <a:pPr marL="0" indent="0" algn="ctr">
               <a:buNone/>
             </a:pPr>
             <a:r>
@@ -3022,7 +2774,7 @@
           <a:bodyPr wrap="square" lIns="0" tIns="0" rIns="0" bIns="0" rtlCol="0" anchor="ctr"/>
           <a:lstStyle/>
           <a:p>
-            <a:pPr indent="0" marL="0">
+            <a:pPr marL="0" indent="0">
               <a:buNone/>
             </a:pPr>
             <a:r>
@@ -3084,7 +2836,7 @@
           <a:bodyPr wrap="square" lIns="0" tIns="0" rIns="0" bIns="0" rtlCol="0" anchor="ctr"/>
           <a:lstStyle/>
           <a:p>
-            <a:pPr indent="0" marL="0">
+            <a:pPr marL="0" indent="0">
               <a:buNone/>
             </a:pPr>
             <a:r>
@@ -3118,6 +2870,7 @@
         <a:solidFill>
           <a:srgbClr val="FAFAF7"/>
         </a:solidFill>
+        <a:effectLst/>
       </p:bgPr>
     </p:bg>
     <p:spTree>
@@ -3155,7 +2908,7 @@
           <a:bodyPr wrap="square" lIns="0" tIns="0" rIns="0" bIns="0" rtlCol="0" anchor="ctr"/>
           <a:lstStyle/>
           <a:p>
-            <a:pPr indent="0" marL="0">
+            <a:pPr marL="0" indent="0">
               <a:buNone/>
             </a:pPr>
             <a:r>
@@ -3217,7 +2970,7 @@
           <a:bodyPr wrap="square" lIns="0" tIns="0" rIns="0" bIns="0" rtlCol="0" anchor="ctr"/>
           <a:lstStyle/>
           <a:p>
-            <a:pPr algn="r" indent="0" marL="0">
+            <a:pPr marL="0" indent="0" algn="r">
               <a:buNone/>
             </a:pPr>
             <a:r>
@@ -3314,7 +3067,7 @@
           <a:bodyPr wrap="square" lIns="0" tIns="0" rIns="0" bIns="0" rtlCol="0" anchor="ctr"/>
           <a:lstStyle/>
           <a:p>
-            <a:pPr indent="0" marL="0">
+            <a:pPr marL="0" indent="0">
               <a:buNone/>
             </a:pPr>
             <a:r>
@@ -3353,7 +3106,7 @@
           <a:bodyPr wrap="square" lIns="0" tIns="0" rIns="0" bIns="0" rtlCol="0" anchor="ctr"/>
           <a:lstStyle/>
           <a:p>
-            <a:pPr indent="0" marL="0">
+            <a:pPr marL="0" indent="0">
               <a:buNone/>
             </a:pPr>
             <a:r>
@@ -3417,7 +3170,7 @@
           <a:bodyPr wrap="square" lIns="0" tIns="0" rIns="0" bIns="0" rtlCol="0" anchor="ctr"/>
           <a:lstStyle/>
           <a:p>
-            <a:pPr algn="ctr" indent="0" marL="0">
+            <a:pPr marL="0" indent="0" algn="ctr">
               <a:buNone/>
             </a:pPr>
             <a:r>
@@ -3481,7 +3234,7 @@
           <a:bodyPr wrap="square" lIns="0" tIns="0" rIns="0" bIns="0" rtlCol="0" anchor="ctr"/>
           <a:lstStyle/>
           <a:p>
-            <a:pPr algn="ctr" indent="0" marL="0">
+            <a:pPr marL="0" indent="0" algn="ctr">
               <a:buNone/>
             </a:pPr>
             <a:r>
@@ -3545,7 +3298,7 @@
           <a:bodyPr wrap="square" lIns="0" tIns="0" rIns="0" bIns="0" rtlCol="0" anchor="ctr"/>
           <a:lstStyle/>
           <a:p>
-            <a:pPr algn="ctr" indent="0" marL="0">
+            <a:pPr marL="0" indent="0" algn="ctr">
               <a:buNone/>
             </a:pPr>
             <a:r>
@@ -3609,7 +3362,7 @@
           <a:bodyPr wrap="square" lIns="0" tIns="0" rIns="0" bIns="0" rtlCol="0" anchor="ctr"/>
           <a:lstStyle/>
           <a:p>
-            <a:pPr algn="ctr" indent="0" marL="0">
+            <a:pPr marL="0" indent="0" algn="ctr">
               <a:buNone/>
             </a:pPr>
             <a:r>
@@ -3673,7 +3426,7 @@
           <a:bodyPr wrap="square" lIns="0" tIns="0" rIns="0" bIns="0" rtlCol="0" anchor="ctr"/>
           <a:lstStyle/>
           <a:p>
-            <a:pPr algn="ctr" indent="0" marL="0">
+            <a:pPr marL="0" indent="0" algn="ctr">
               <a:buNone/>
             </a:pPr>
             <a:r>
@@ -3739,7 +3492,7 @@
           <a:bodyPr wrap="square" lIns="0" tIns="0" rIns="0" bIns="0" rtlCol="0" anchor="ctr"/>
           <a:lstStyle/>
           <a:p>
-            <a:pPr algn="ctr" indent="0" marL="0">
+            <a:pPr marL="0" indent="0" algn="ctr">
               <a:buNone/>
             </a:pPr>
             <a:r>
@@ -3805,7 +3558,7 @@
           <a:bodyPr wrap="square" lIns="0" tIns="0" rIns="0" bIns="0" rtlCol="0" anchor="ctr"/>
           <a:lstStyle/>
           <a:p>
-            <a:pPr algn="ctr" indent="0" marL="0">
+            <a:pPr marL="0" indent="0" algn="ctr">
               <a:buNone/>
             </a:pPr>
             <a:r>
@@ -3871,7 +3624,7 @@
           <a:bodyPr wrap="square" lIns="0" tIns="0" rIns="0" bIns="0" rtlCol="0" anchor="ctr"/>
           <a:lstStyle/>
           <a:p>
-            <a:pPr algn="ctr" indent="0" marL="0">
+            <a:pPr marL="0" indent="0" algn="ctr">
               <a:buNone/>
             </a:pPr>
             <a:r>
@@ -3937,7 +3690,7 @@
           <a:bodyPr wrap="square" lIns="0" tIns="0" rIns="0" bIns="0" rtlCol="0" anchor="ctr"/>
           <a:lstStyle/>
           <a:p>
-            <a:pPr algn="ctr" indent="0" marL="0">
+            <a:pPr marL="0" indent="0" algn="ctr">
               <a:buNone/>
             </a:pPr>
             <a:r>
@@ -4115,7 +3868,7 @@
           <a:bodyPr wrap="square" lIns="0" tIns="0" rIns="0" bIns="0" rtlCol="0" anchor="ctr"/>
           <a:lstStyle/>
           <a:p>
-            <a:pPr algn="ctr" indent="0" marL="0">
+            <a:pPr marL="0" indent="0" algn="ctr">
               <a:buNone/>
             </a:pPr>
             <a:r>
@@ -4154,7 +3907,7 @@
           <a:bodyPr wrap="square" lIns="0" tIns="0" rIns="0" bIns="0" rtlCol="0" anchor="ctr"/>
           <a:lstStyle/>
           <a:p>
-            <a:pPr indent="0" marL="0">
+            <a:pPr marL="0" indent="0">
               <a:buNone/>
             </a:pPr>
             <a:r>
@@ -4220,7 +3973,7 @@
           <a:bodyPr wrap="square" lIns="0" tIns="0" rIns="0" bIns="0" rtlCol="0" anchor="ctr"/>
           <a:lstStyle/>
           <a:p>
-            <a:pPr algn="ctr" indent="0" marL="0">
+            <a:pPr marL="0" indent="0" algn="ctr">
               <a:buNone/>
             </a:pPr>
             <a:r>
@@ -4259,7 +4012,7 @@
           <a:bodyPr wrap="square" lIns="0" tIns="0" rIns="0" bIns="0" rtlCol="0" anchor="ctr"/>
           <a:lstStyle/>
           <a:p>
-            <a:pPr indent="0" marL="0">
+            <a:pPr marL="0" indent="0">
               <a:buNone/>
             </a:pPr>
             <a:r>
@@ -4293,6 +4046,7 @@
         <a:solidFill>
           <a:srgbClr val="FAFAF7"/>
         </a:solidFill>
+        <a:effectLst/>
       </p:bgPr>
     </p:bg>
     <p:spTree>
@@ -4330,7 +4084,7 @@
           <a:bodyPr wrap="square" lIns="0" tIns="0" rIns="0" bIns="0" rtlCol="0" anchor="ctr"/>
           <a:lstStyle/>
           <a:p>
-            <a:pPr indent="0" marL="0">
+            <a:pPr marL="0" indent="0">
               <a:buNone/>
             </a:pPr>
             <a:r>
@@ -4392,7 +4146,7 @@
           <a:bodyPr wrap="square" lIns="0" tIns="0" rIns="0" bIns="0" rtlCol="0" anchor="ctr"/>
           <a:lstStyle/>
           <a:p>
-            <a:pPr algn="r" indent="0" marL="0">
+            <a:pPr marL="0" indent="0" algn="r">
               <a:buNone/>
             </a:pPr>
             <a:r>
@@ -4489,7 +4243,7 @@
           <a:bodyPr wrap="square" lIns="0" tIns="0" rIns="0" bIns="0" rtlCol="0" anchor="ctr"/>
           <a:lstStyle/>
           <a:p>
-            <a:pPr indent="0" marL="0">
+            <a:pPr marL="0" indent="0">
               <a:buNone/>
             </a:pPr>
             <a:r>
@@ -4528,7 +4282,7 @@
           <a:bodyPr wrap="square" lIns="0" tIns="0" rIns="0" bIns="0" rtlCol="0" anchor="ctr"/>
           <a:lstStyle/>
           <a:p>
-            <a:pPr indent="0" marL="0">
+            <a:pPr marL="0" indent="0">
               <a:buNone/>
             </a:pPr>
             <a:r>
@@ -4594,7 +4348,7 @@
           <a:bodyPr wrap="square" lIns="0" tIns="0" rIns="0" bIns="0" rtlCol="0" anchor="ctr"/>
           <a:lstStyle/>
           <a:p>
-            <a:pPr algn="ctr" indent="0" marL="0">
+            <a:pPr marL="0" indent="0" algn="ctr">
               <a:buNone/>
             </a:pPr>
             <a:r>
@@ -4660,7 +4414,7 @@
           <a:bodyPr wrap="square" lIns="0" tIns="0" rIns="0" bIns="0" rtlCol="0" anchor="ctr"/>
           <a:lstStyle/>
           <a:p>
-            <a:pPr algn="ctr" indent="0" marL="0">
+            <a:pPr marL="0" indent="0" algn="ctr">
               <a:buNone/>
             </a:pPr>
             <a:r>
@@ -4677,7 +4431,7 @@
             <a:endParaRPr lang="en-US" sz="1820" dirty="0"/>
           </a:p>
           <a:p>
-            <a:pPr algn="ctr" indent="0" marL="0">
+            <a:pPr marL="0" indent="0" algn="ctr">
               <a:buNone/>
             </a:pPr>
             <a:r>
@@ -4855,7 +4609,7 @@
           <a:bodyPr wrap="square" lIns="0" tIns="0" rIns="0" bIns="0" rtlCol="0" anchor="ctr"/>
           <a:lstStyle/>
           <a:p>
-            <a:pPr algn="ctr" indent="0" marL="0">
+            <a:pPr marL="0" indent="0" algn="ctr">
               <a:buNone/>
             </a:pPr>
             <a:r>
@@ -4894,7 +4648,7 @@
           <a:bodyPr wrap="square" lIns="0" tIns="0" rIns="0" bIns="0" rtlCol="0" anchor="ctr"/>
           <a:lstStyle/>
           <a:p>
-            <a:pPr indent="0" marL="0">
+            <a:pPr marL="0" indent="0">
               <a:buNone/>
             </a:pPr>
             <a:r>
@@ -4956,7 +4710,7 @@
           <a:bodyPr wrap="square" lIns="0" tIns="0" rIns="0" bIns="0" rtlCol="0" anchor="ctr"/>
           <a:lstStyle/>
           <a:p>
-            <a:pPr indent="0" marL="0">
+            <a:pPr marL="0" indent="0">
               <a:buNone/>
             </a:pPr>
             <a:r>
@@ -4995,7 +4749,7 @@
           <a:bodyPr wrap="square" lIns="0" tIns="0" rIns="0" bIns="0" rtlCol="0" anchor="ctr"/>
           <a:lstStyle/>
           <a:p>
-            <a:pPr indent="0" marL="0">
+            <a:pPr marL="0" indent="0">
               <a:buNone/>
             </a:pPr>
             <a:r>
@@ -5034,7 +4788,7 @@
           <a:bodyPr wrap="square" lIns="0" tIns="0" rIns="0" bIns="0" rtlCol="0" anchor="ctr"/>
           <a:lstStyle/>
           <a:p>
-            <a:pPr indent="0" marL="0">
+            <a:pPr marL="0" indent="0">
               <a:buNone/>
             </a:pPr>
             <a:r>
@@ -5060,7 +4814,7 @@
         </p:nvSpPr>
         <p:spPr>
           <a:xfrm>
-            <a:off x="4251960" y="4572000"/>
+            <a:off x="4251960" y="4709559"/>
             <a:ext cx="3337560" cy="347472"/>
           </a:xfrm>
           <a:prstGeom prst="rect">
@@ -5073,7 +4827,7 @@
           <a:bodyPr wrap="square" lIns="0" tIns="0" rIns="0" bIns="0" rtlCol="0" anchor="ctr"/>
           <a:lstStyle/>
           <a:p>
-            <a:pPr indent="0" marL="0">
+            <a:pPr marL="0" indent="0">
               <a:buNone/>
             </a:pPr>
             <a:r>
@@ -5112,7 +4866,7 @@
           <a:bodyPr wrap="square" lIns="0" tIns="0" rIns="0" bIns="0" rtlCol="0" anchor="ctr"/>
           <a:lstStyle/>
           <a:p>
-            <a:pPr indent="0" marL="0">
+            <a:pPr marL="0" indent="0">
               <a:buNone/>
             </a:pPr>
             <a:r>
@@ -5138,7 +4892,7 @@
         </p:nvSpPr>
         <p:spPr>
           <a:xfrm>
-            <a:off x="8028432" y="4572000"/>
+            <a:off x="8028432" y="4786884"/>
             <a:ext cx="3429000" cy="347472"/>
           </a:xfrm>
           <a:prstGeom prst="rect">
@@ -5151,7 +4905,7 @@
           <a:bodyPr wrap="square" lIns="0" tIns="0" rIns="0" bIns="0" rtlCol="0" anchor="ctr"/>
           <a:lstStyle/>
           <a:p>
-            <a:pPr indent="0" marL="0">
+            <a:pPr marL="0" indent="0">
               <a:buNone/>
             </a:pPr>
             <a:r>
@@ -5185,6 +4939,7 @@
         <a:solidFill>
           <a:srgbClr val="FAFAF7"/>
         </a:solidFill>
+        <a:effectLst/>
       </p:bgPr>
     </p:bg>
     <p:spTree>
@@ -5222,7 +4977,7 @@
           <a:bodyPr wrap="square" lIns="0" tIns="0" rIns="0" bIns="0" rtlCol="0" anchor="ctr"/>
           <a:lstStyle/>
           <a:p>
-            <a:pPr indent="0" marL="0">
+            <a:pPr marL="0" indent="0">
               <a:buNone/>
             </a:pPr>
             <a:r>
@@ -5284,7 +5039,7 @@
           <a:bodyPr wrap="square" lIns="0" tIns="0" rIns="0" bIns="0" rtlCol="0" anchor="ctr"/>
           <a:lstStyle/>
           <a:p>
-            <a:pPr algn="r" indent="0" marL="0">
+            <a:pPr marL="0" indent="0" algn="r">
               <a:buNone/>
             </a:pPr>
             <a:r>
@@ -5381,7 +5136,7 @@
           <a:bodyPr wrap="square" lIns="0" tIns="0" rIns="0" bIns="0" rtlCol="0" anchor="ctr"/>
           <a:lstStyle/>
           <a:p>
-            <a:pPr indent="0" marL="0">
+            <a:pPr marL="0" indent="0">
               <a:buNone/>
             </a:pPr>
             <a:r>
@@ -5420,7 +5175,7 @@
           <a:bodyPr wrap="square" lIns="0" tIns="0" rIns="0" bIns="0" rtlCol="0" anchor="ctr"/>
           <a:lstStyle/>
           <a:p>
-            <a:pPr indent="0" marL="0">
+            <a:pPr marL="0" indent="0">
               <a:buNone/>
             </a:pPr>
             <a:r>
@@ -5486,7 +5241,7 @@
           <a:bodyPr wrap="square" lIns="0" tIns="0" rIns="0" bIns="0" rtlCol="0" anchor="ctr"/>
           <a:lstStyle/>
           <a:p>
-            <a:pPr indent="0" marL="0">
+            <a:pPr marL="0" indent="0">
               <a:buNone/>
             </a:pPr>
             <a:r>
@@ -5498,7 +5253,7 @@
                 <a:ea typeface="Arial" pitchFamily="34" charset="-122"/>
                 <a:cs typeface="Arial" pitchFamily="34" charset="-120"/>
               </a:rPr>
-              <a:t>1. Commercial medical benefit</a:t>
+              <a:t>1. Commercial Medical Benefit</a:t>
             </a:r>
             <a:endParaRPr lang="en-US" sz="1040" dirty="0"/>
           </a:p>
@@ -5525,7 +5280,7 @@
           <a:bodyPr wrap="square" lIns="0" tIns="0" rIns="0" bIns="0" rtlCol="0" anchor="ctr"/>
           <a:lstStyle/>
           <a:p>
-            <a:pPr indent="0" marL="0">
+            <a:pPr marL="0" indent="0">
               <a:buNone/>
             </a:pPr>
             <a:r>
@@ -5587,7 +5342,7 @@
           <a:bodyPr wrap="square" lIns="0" tIns="0" rIns="0" bIns="0" rtlCol="0" anchor="ctr"/>
           <a:lstStyle/>
           <a:p>
-            <a:pPr indent="0" marL="0">
+            <a:pPr marL="0" indent="0">
               <a:buNone/>
             </a:pPr>
             <a:r>
@@ -5653,7 +5408,7 @@
           <a:bodyPr wrap="square" lIns="0" tIns="0" rIns="0" bIns="0" rtlCol="0" anchor="ctr"/>
           <a:lstStyle/>
           <a:p>
-            <a:pPr indent="0" marL="0">
+            <a:pPr marL="0" indent="0">
               <a:buNone/>
             </a:pPr>
             <a:r>
@@ -5692,7 +5447,7 @@
           <a:bodyPr wrap="square" lIns="0" tIns="0" rIns="0" bIns="0" rtlCol="0" anchor="ctr"/>
           <a:lstStyle/>
           <a:p>
-            <a:pPr indent="0" marL="0">
+            <a:pPr marL="0" indent="0">
               <a:buNone/>
             </a:pPr>
             <a:r>
@@ -5754,7 +5509,7 @@
           <a:bodyPr wrap="square" lIns="0" tIns="0" rIns="0" bIns="0" rtlCol="0" anchor="ctr"/>
           <a:lstStyle/>
           <a:p>
-            <a:pPr indent="0" marL="0">
+            <a:pPr marL="0" indent="0">
               <a:buNone/>
             </a:pPr>
             <a:r>
@@ -5820,7 +5575,7 @@
           <a:bodyPr wrap="square" lIns="0" tIns="0" rIns="0" bIns="0" rtlCol="0" anchor="ctr"/>
           <a:lstStyle/>
           <a:p>
-            <a:pPr indent="0" marL="0">
+            <a:pPr marL="0" indent="0">
               <a:buNone/>
             </a:pPr>
             <a:r>
@@ -5859,7 +5614,7 @@
           <a:bodyPr wrap="square" lIns="0" tIns="0" rIns="0" bIns="0" rtlCol="0" anchor="ctr"/>
           <a:lstStyle/>
           <a:p>
-            <a:pPr indent="0" marL="0">
+            <a:pPr marL="0" indent="0">
               <a:buNone/>
             </a:pPr>
             <a:r>
@@ -5921,7 +5676,7 @@
           <a:bodyPr wrap="square" lIns="0" tIns="0" rIns="0" bIns="0" rtlCol="0" anchor="ctr"/>
           <a:lstStyle/>
           <a:p>
-            <a:pPr indent="0" marL="0">
+            <a:pPr marL="0" indent="0">
               <a:buNone/>
             </a:pPr>
             <a:r>
@@ -5987,7 +5742,7 @@
           <a:bodyPr wrap="square" lIns="0" tIns="0" rIns="0" bIns="0" rtlCol="0" anchor="ctr"/>
           <a:lstStyle/>
           <a:p>
-            <a:pPr indent="0" marL="0">
+            <a:pPr marL="0" indent="0">
               <a:buNone/>
             </a:pPr>
             <a:r>
@@ -6026,7 +5781,7 @@
           <a:bodyPr wrap="square" lIns="0" tIns="0" rIns="0" bIns="0" rtlCol="0" anchor="ctr"/>
           <a:lstStyle/>
           <a:p>
-            <a:pPr indent="0" marL="0">
+            <a:pPr marL="0" indent="0">
               <a:buNone/>
             </a:pPr>
             <a:r>
@@ -6088,7 +5843,7 @@
           <a:bodyPr wrap="square" lIns="0" tIns="0" rIns="0" bIns="0" rtlCol="0" anchor="ctr"/>
           <a:lstStyle/>
           <a:p>
-            <a:pPr indent="0" marL="0">
+            <a:pPr marL="0" indent="0">
               <a:buNone/>
             </a:pPr>
             <a:r>
@@ -6154,7 +5909,7 @@
           <a:bodyPr wrap="square" lIns="0" tIns="0" rIns="0" bIns="0" rtlCol="0" anchor="ctr"/>
           <a:lstStyle/>
           <a:p>
-            <a:pPr indent="0" marL="0">
+            <a:pPr marL="0" indent="0">
               <a:buNone/>
             </a:pPr>
             <a:r>
@@ -6193,7 +5948,7 @@
           <a:bodyPr wrap="square" lIns="0" tIns="0" rIns="0" bIns="0" rtlCol="0" anchor="ctr"/>
           <a:lstStyle/>
           <a:p>
-            <a:pPr indent="0" marL="0">
+            <a:pPr marL="0" indent="0">
               <a:buNone/>
             </a:pPr>
             <a:r>
@@ -6255,7 +6010,7 @@
           <a:bodyPr wrap="square" lIns="0" tIns="0" rIns="0" bIns="0" rtlCol="0" anchor="ctr"/>
           <a:lstStyle/>
           <a:p>
-            <a:pPr indent="0" marL="0">
+            <a:pPr marL="0" indent="0">
               <a:buNone/>
             </a:pPr>
             <a:r>
@@ -6289,6 +6044,7 @@
         <a:solidFill>
           <a:srgbClr val="FAFAF7"/>
         </a:solidFill>
+        <a:effectLst/>
       </p:bgPr>
     </p:bg>
     <p:spTree>
@@ -6326,7 +6082,7 @@
           <a:bodyPr wrap="square" lIns="0" tIns="0" rIns="0" bIns="0" rtlCol="0" anchor="ctr"/>
           <a:lstStyle/>
           <a:p>
-            <a:pPr indent="0" marL="0">
+            <a:pPr marL="0" indent="0">
               <a:buNone/>
             </a:pPr>
             <a:r>
@@ -6388,7 +6144,7 @@
           <a:bodyPr wrap="square" lIns="0" tIns="0" rIns="0" bIns="0" rtlCol="0" anchor="ctr"/>
           <a:lstStyle/>
           <a:p>
-            <a:pPr algn="r" indent="0" marL="0">
+            <a:pPr marL="0" indent="0" algn="r">
               <a:buNone/>
             </a:pPr>
             <a:r>
@@ -6485,7 +6241,7 @@
           <a:bodyPr wrap="square" lIns="0" tIns="0" rIns="0" bIns="0" rtlCol="0" anchor="ctr"/>
           <a:lstStyle/>
           <a:p>
-            <a:pPr indent="0" marL="0">
+            <a:pPr marL="0" indent="0">
               <a:buNone/>
             </a:pPr>
             <a:r>
@@ -6524,7 +6280,7 @@
           <a:bodyPr wrap="square" lIns="0" tIns="0" rIns="0" bIns="0" rtlCol="0" anchor="ctr"/>
           <a:lstStyle/>
           <a:p>
-            <a:pPr indent="0" marL="0">
+            <a:pPr marL="0" indent="0">
               <a:buNone/>
             </a:pPr>
             <a:r>
@@ -6669,7 +6425,7 @@
           <a:bodyPr wrap="square" lIns="0" tIns="0" rIns="0" bIns="0" rtlCol="0" anchor="ctr"/>
           <a:lstStyle/>
           <a:p>
-            <a:pPr algn="ctr" indent="0" marL="0">
+            <a:pPr marL="0" indent="0" algn="ctr">
               <a:buNone/>
             </a:pPr>
             <a:r>
@@ -6708,7 +6464,7 @@
           <a:bodyPr wrap="square" lIns="0" tIns="0" rIns="0" bIns="0" rtlCol="0" anchor="ctr"/>
           <a:lstStyle/>
           <a:p>
-            <a:pPr indent="0" marL="0">
+            <a:pPr marL="0" indent="0">
               <a:buNone/>
             </a:pPr>
             <a:r>
@@ -6725,7 +6481,7 @@
             <a:endParaRPr lang="en-US" sz="1040" dirty="0"/>
           </a:p>
           <a:p>
-            <a:pPr indent="0" marL="0">
+            <a:pPr marL="0" indent="0">
               <a:buNone/>
             </a:pPr>
             <a:r>
@@ -6764,7 +6520,7 @@
           <a:bodyPr wrap="square" lIns="0" tIns="0" rIns="0" bIns="0" rtlCol="0" anchor="t"/>
           <a:lstStyle/>
           <a:p>
-            <a:pPr indent="0" marL="0">
+            <a:pPr marL="0" indent="0">
               <a:buNone/>
             </a:pPr>
             <a:r>
@@ -6803,7 +6559,7 @@
           <a:bodyPr wrap="square" lIns="0" tIns="0" rIns="0" bIns="0" rtlCol="0" anchor="ctr"/>
           <a:lstStyle/>
           <a:p>
-            <a:pPr indent="0" marL="0">
+            <a:pPr marL="0" indent="0">
               <a:buNone/>
             </a:pPr>
             <a:r>
@@ -6865,7 +6621,7 @@
           <a:bodyPr wrap="square" lIns="0" tIns="0" rIns="0" bIns="0" rtlCol="0" anchor="t"/>
           <a:lstStyle/>
           <a:p>
-            <a:pPr indent="0" marL="0">
+            <a:pPr marL="0" indent="0">
               <a:buNone/>
             </a:pPr>
             <a:r>
@@ -7010,7 +6766,7 @@
           <a:bodyPr wrap="square" lIns="0" tIns="0" rIns="0" bIns="0" rtlCol="0" anchor="ctr"/>
           <a:lstStyle/>
           <a:p>
-            <a:pPr algn="ctr" indent="0" marL="0">
+            <a:pPr marL="0" indent="0" algn="ctr">
               <a:buNone/>
             </a:pPr>
             <a:r>
@@ -7049,7 +6805,7 @@
           <a:bodyPr wrap="square" lIns="0" tIns="0" rIns="0" bIns="0" rtlCol="0" anchor="ctr"/>
           <a:lstStyle/>
           <a:p>
-            <a:pPr indent="0" marL="0">
+            <a:pPr marL="0" indent="0">
               <a:buNone/>
             </a:pPr>
             <a:r>
@@ -7066,7 +6822,7 @@
             <a:endParaRPr lang="en-US" sz="1040" dirty="0"/>
           </a:p>
           <a:p>
-            <a:pPr indent="0" marL="0">
+            <a:pPr marL="0" indent="0">
               <a:buNone/>
             </a:pPr>
             <a:r>
@@ -7105,7 +6861,7 @@
           <a:bodyPr wrap="square" lIns="0" tIns="0" rIns="0" bIns="0" rtlCol="0" anchor="t"/>
           <a:lstStyle/>
           <a:p>
-            <a:pPr indent="0" marL="0">
+            <a:pPr marL="0" indent="0">
               <a:buNone/>
             </a:pPr>
             <a:r>
@@ -7144,7 +6900,7 @@
           <a:bodyPr wrap="square" lIns="0" tIns="0" rIns="0" bIns="0" rtlCol="0" anchor="ctr"/>
           <a:lstStyle/>
           <a:p>
-            <a:pPr indent="0" marL="0">
+            <a:pPr marL="0" indent="0">
               <a:buNone/>
             </a:pPr>
             <a:r>
@@ -7206,7 +6962,7 @@
           <a:bodyPr wrap="square" lIns="0" tIns="0" rIns="0" bIns="0" rtlCol="0" anchor="t"/>
           <a:lstStyle/>
           <a:p>
-            <a:pPr indent="0" marL="0">
+            <a:pPr marL="0" indent="0">
               <a:buNone/>
             </a:pPr>
             <a:r>
@@ -7351,7 +7107,7 @@
           <a:bodyPr wrap="square" lIns="0" tIns="0" rIns="0" bIns="0" rtlCol="0" anchor="ctr"/>
           <a:lstStyle/>
           <a:p>
-            <a:pPr algn="ctr" indent="0" marL="0">
+            <a:pPr marL="0" indent="0" algn="ctr">
               <a:buNone/>
             </a:pPr>
             <a:r>
@@ -7390,7 +7146,7 @@
           <a:bodyPr wrap="square" lIns="0" tIns="0" rIns="0" bIns="0" rtlCol="0" anchor="ctr"/>
           <a:lstStyle/>
           <a:p>
-            <a:pPr indent="0" marL="0">
+            <a:pPr marL="0" indent="0">
               <a:buNone/>
             </a:pPr>
             <a:r>
@@ -7407,7 +7163,7 @@
             <a:endParaRPr lang="en-US" sz="1040" dirty="0"/>
           </a:p>
           <a:p>
-            <a:pPr indent="0" marL="0">
+            <a:pPr marL="0" indent="0">
               <a:buNone/>
             </a:pPr>
             <a:r>
@@ -7446,7 +7202,7 @@
           <a:bodyPr wrap="square" lIns="0" tIns="0" rIns="0" bIns="0" rtlCol="0" anchor="t"/>
           <a:lstStyle/>
           <a:p>
-            <a:pPr indent="0" marL="0">
+            <a:pPr marL="0" indent="0">
               <a:buNone/>
             </a:pPr>
             <a:r>
@@ -7485,7 +7241,7 @@
           <a:bodyPr wrap="square" lIns="0" tIns="0" rIns="0" bIns="0" rtlCol="0" anchor="ctr"/>
           <a:lstStyle/>
           <a:p>
-            <a:pPr indent="0" marL="0">
+            <a:pPr marL="0" indent="0">
               <a:buNone/>
             </a:pPr>
             <a:r>
@@ -7547,7 +7303,7 @@
           <a:bodyPr wrap="square" lIns="0" tIns="0" rIns="0" bIns="0" rtlCol="0" anchor="t"/>
           <a:lstStyle/>
           <a:p>
-            <a:pPr indent="0" marL="0">
+            <a:pPr marL="0" indent="0">
               <a:buNone/>
             </a:pPr>
             <a:r>
@@ -7692,7 +7448,7 @@
           <a:bodyPr wrap="square" lIns="0" tIns="0" rIns="0" bIns="0" rtlCol="0" anchor="ctr"/>
           <a:lstStyle/>
           <a:p>
-            <a:pPr algn="ctr" indent="0" marL="0">
+            <a:pPr marL="0" indent="0" algn="ctr">
               <a:buNone/>
             </a:pPr>
             <a:r>
@@ -7731,7 +7487,7 @@
           <a:bodyPr wrap="square" lIns="0" tIns="0" rIns="0" bIns="0" rtlCol="0" anchor="ctr"/>
           <a:lstStyle/>
           <a:p>
-            <a:pPr indent="0" marL="0">
+            <a:pPr marL="0" indent="0">
               <a:buNone/>
             </a:pPr>
             <a:r>
@@ -7770,7 +7526,7 @@
           <a:bodyPr wrap="square" lIns="0" tIns="0" rIns="0" bIns="0" rtlCol="0" anchor="t"/>
           <a:lstStyle/>
           <a:p>
-            <a:pPr indent="0" marL="0">
+            <a:pPr marL="0" indent="0">
               <a:buNone/>
             </a:pPr>
             <a:r>
@@ -7809,7 +7565,7 @@
           <a:bodyPr wrap="square" lIns="0" tIns="0" rIns="0" bIns="0" rtlCol="0" anchor="ctr"/>
           <a:lstStyle/>
           <a:p>
-            <a:pPr indent="0" marL="0">
+            <a:pPr marL="0" indent="0">
               <a:buNone/>
             </a:pPr>
             <a:r>
@@ -7871,7 +7627,7 @@
           <a:bodyPr wrap="square" lIns="0" tIns="0" rIns="0" bIns="0" rtlCol="0" anchor="t"/>
           <a:lstStyle/>
           <a:p>
-            <a:pPr indent="0" marL="0">
+            <a:pPr marL="0" indent="0">
               <a:buNone/>
             </a:pPr>
             <a:r>
@@ -8016,7 +7772,7 @@
           <a:bodyPr wrap="square" lIns="0" tIns="0" rIns="0" bIns="0" rtlCol="0" anchor="ctr"/>
           <a:lstStyle/>
           <a:p>
-            <a:pPr algn="ctr" indent="0" marL="0">
+            <a:pPr marL="0" indent="0" algn="ctr">
               <a:buNone/>
             </a:pPr>
             <a:r>
@@ -8055,7 +7811,7 @@
           <a:bodyPr wrap="square" lIns="0" tIns="0" rIns="0" bIns="0" rtlCol="0" anchor="ctr"/>
           <a:lstStyle/>
           <a:p>
-            <a:pPr indent="0" marL="0">
+            <a:pPr marL="0" indent="0">
               <a:buNone/>
             </a:pPr>
             <a:r>
@@ -8094,7 +7850,7 @@
           <a:bodyPr wrap="square" lIns="0" tIns="0" rIns="0" bIns="0" rtlCol="0" anchor="t"/>
           <a:lstStyle/>
           <a:p>
-            <a:pPr indent="0" marL="0">
+            <a:pPr marL="0" indent="0">
               <a:buNone/>
             </a:pPr>
             <a:r>
@@ -8133,7 +7889,7 @@
           <a:bodyPr wrap="square" lIns="0" tIns="0" rIns="0" bIns="0" rtlCol="0" anchor="ctr"/>
           <a:lstStyle/>
           <a:p>
-            <a:pPr indent="0" marL="0">
+            <a:pPr marL="0" indent="0">
               <a:buNone/>
             </a:pPr>
             <a:r>
@@ -8195,7 +7951,7 @@
           <a:bodyPr wrap="square" lIns="0" tIns="0" rIns="0" bIns="0" rtlCol="0" anchor="t"/>
           <a:lstStyle/>
           <a:p>
-            <a:pPr indent="0" marL="0">
+            <a:pPr marL="0" indent="0">
               <a:buNone/>
             </a:pPr>
             <a:r>
@@ -8340,7 +8096,7 @@
           <a:bodyPr wrap="square" lIns="0" tIns="0" rIns="0" bIns="0" rtlCol="0" anchor="ctr"/>
           <a:lstStyle/>
           <a:p>
-            <a:pPr algn="ctr" indent="0" marL="0">
+            <a:pPr marL="0" indent="0" algn="ctr">
               <a:buNone/>
             </a:pPr>
             <a:r>
@@ -8379,7 +8135,7 @@
           <a:bodyPr wrap="square" lIns="0" tIns="0" rIns="0" bIns="0" rtlCol="0" anchor="ctr"/>
           <a:lstStyle/>
           <a:p>
-            <a:pPr indent="0" marL="0">
+            <a:pPr marL="0" indent="0">
               <a:buNone/>
             </a:pPr>
             <a:r>
@@ -8418,7 +8174,7 @@
           <a:bodyPr wrap="square" lIns="0" tIns="0" rIns="0" bIns="0" rtlCol="0" anchor="t"/>
           <a:lstStyle/>
           <a:p>
-            <a:pPr indent="0" marL="0">
+            <a:pPr marL="0" indent="0">
               <a:buNone/>
             </a:pPr>
             <a:r>
@@ -8457,7 +8213,7 @@
           <a:bodyPr wrap="square" lIns="0" tIns="0" rIns="0" bIns="0" rtlCol="0" anchor="ctr"/>
           <a:lstStyle/>
           <a:p>
-            <a:pPr indent="0" marL="0">
+            <a:pPr marL="0" indent="0">
               <a:buNone/>
             </a:pPr>
             <a:r>
@@ -8519,7 +8275,7 @@
           <a:bodyPr wrap="square" lIns="0" tIns="0" rIns="0" bIns="0" rtlCol="0" anchor="t"/>
           <a:lstStyle/>
           <a:p>
-            <a:pPr indent="0" marL="0">
+            <a:pPr marL="0" indent="0">
               <a:buNone/>
             </a:pPr>
             <a:r>
@@ -8553,6 +8309,7 @@
         <a:solidFill>
           <a:srgbClr val="FAFAF7"/>
         </a:solidFill>
+        <a:effectLst/>
       </p:bgPr>
     </p:bg>
     <p:spTree>
@@ -8590,7 +8347,7 @@
           <a:bodyPr wrap="square" lIns="0" tIns="0" rIns="0" bIns="0" rtlCol="0" anchor="ctr"/>
           <a:lstStyle/>
           <a:p>
-            <a:pPr indent="0" marL="0">
+            <a:pPr marL="0" indent="0">
               <a:buNone/>
             </a:pPr>
             <a:r>
@@ -8652,7 +8409,7 @@
           <a:bodyPr wrap="square" lIns="0" tIns="0" rIns="0" bIns="0" rtlCol="0" anchor="ctr"/>
           <a:lstStyle/>
           <a:p>
-            <a:pPr algn="r" indent="0" marL="0">
+            <a:pPr marL="0" indent="0" algn="r">
               <a:buNone/>
             </a:pPr>
             <a:r>
@@ -8749,7 +8506,7 @@
           <a:bodyPr wrap="square" lIns="0" tIns="0" rIns="0" bIns="0" rtlCol="0" anchor="ctr"/>
           <a:lstStyle/>
           <a:p>
-            <a:pPr indent="0" marL="0">
+            <a:pPr marL="0" indent="0">
               <a:buNone/>
             </a:pPr>
             <a:r>
@@ -8788,7 +8545,7 @@
           <a:bodyPr wrap="square" lIns="0" tIns="0" rIns="0" bIns="0" rtlCol="0" anchor="ctr"/>
           <a:lstStyle/>
           <a:p>
-            <a:pPr indent="0" marL="0">
+            <a:pPr marL="0" indent="0">
               <a:buNone/>
             </a:pPr>
             <a:r>
@@ -8854,7 +8611,7 @@
           <a:bodyPr wrap="square" lIns="0" tIns="0" rIns="0" bIns="0" rtlCol="0" anchor="ctr"/>
           <a:lstStyle/>
           <a:p>
-            <a:pPr algn="ctr" indent="0" marL="0">
+            <a:pPr marL="0" indent="0" algn="ctr">
               <a:buNone/>
             </a:pPr>
             <a:r>
@@ -8893,7 +8650,7 @@
           <a:bodyPr wrap="square" lIns="0" tIns="0" rIns="0" bIns="0" rtlCol="0" anchor="ctr"/>
           <a:lstStyle/>
           <a:p>
-            <a:pPr indent="0" marL="0">
+            <a:pPr marL="0" indent="0">
               <a:buNone/>
             </a:pPr>
             <a:r>
@@ -8932,7 +8689,7 @@
           <a:bodyPr wrap="square" lIns="0" tIns="0" rIns="0" bIns="0" rtlCol="0" anchor="ctr"/>
           <a:lstStyle/>
           <a:p>
-            <a:pPr indent="0" marL="0">
+            <a:pPr marL="0" indent="0">
               <a:buNone/>
             </a:pPr>
             <a:r>
@@ -8998,7 +8755,7 @@
           <a:bodyPr wrap="square" lIns="0" tIns="0" rIns="0" bIns="0" rtlCol="0" anchor="ctr"/>
           <a:lstStyle/>
           <a:p>
-            <a:pPr algn="ctr" indent="0" marL="0">
+            <a:pPr marL="0" indent="0" algn="ctr">
               <a:buNone/>
             </a:pPr>
             <a:r>
@@ -9037,7 +8794,7 @@
           <a:bodyPr wrap="square" lIns="0" tIns="0" rIns="0" bIns="0" rtlCol="0" anchor="ctr"/>
           <a:lstStyle/>
           <a:p>
-            <a:pPr indent="0" marL="0">
+            <a:pPr marL="0" indent="0">
               <a:buNone/>
             </a:pPr>
             <a:r>
@@ -9076,7 +8833,7 @@
           <a:bodyPr wrap="square" lIns="0" tIns="0" rIns="0" bIns="0" rtlCol="0" anchor="ctr"/>
           <a:lstStyle/>
           <a:p>
-            <a:pPr indent="0" marL="0">
+            <a:pPr marL="0" indent="0">
               <a:buNone/>
             </a:pPr>
             <a:r>
@@ -9142,7 +8899,7 @@
           <a:bodyPr wrap="square" lIns="0" tIns="0" rIns="0" bIns="0" rtlCol="0" anchor="ctr"/>
           <a:lstStyle/>
           <a:p>
-            <a:pPr algn="ctr" indent="0" marL="0">
+            <a:pPr marL="0" indent="0" algn="ctr">
               <a:buNone/>
             </a:pPr>
             <a:r>
@@ -9181,7 +8938,7 @@
           <a:bodyPr wrap="square" lIns="0" tIns="0" rIns="0" bIns="0" rtlCol="0" anchor="ctr"/>
           <a:lstStyle/>
           <a:p>
-            <a:pPr indent="0" marL="0">
+            <a:pPr marL="0" indent="0">
               <a:buNone/>
             </a:pPr>
             <a:r>
@@ -9220,7 +8977,7 @@
           <a:bodyPr wrap="square" lIns="0" tIns="0" rIns="0" bIns="0" rtlCol="0" anchor="ctr"/>
           <a:lstStyle/>
           <a:p>
-            <a:pPr indent="0" marL="0">
+            <a:pPr marL="0" indent="0">
               <a:buNone/>
             </a:pPr>
             <a:r>
@@ -9286,7 +9043,7 @@
           <a:bodyPr wrap="square" lIns="0" tIns="0" rIns="0" bIns="0" rtlCol="0" anchor="ctr"/>
           <a:lstStyle/>
           <a:p>
-            <a:pPr algn="ctr" indent="0" marL="0">
+            <a:pPr marL="0" indent="0" algn="ctr">
               <a:buNone/>
             </a:pPr>
             <a:r>
@@ -9325,7 +9082,7 @@
           <a:bodyPr wrap="square" lIns="0" tIns="0" rIns="0" bIns="0" rtlCol="0" anchor="ctr"/>
           <a:lstStyle/>
           <a:p>
-            <a:pPr indent="0" marL="0">
+            <a:pPr marL="0" indent="0">
               <a:buNone/>
             </a:pPr>
             <a:r>
@@ -9364,7 +9121,7 @@
           <a:bodyPr wrap="square" lIns="0" tIns="0" rIns="0" bIns="0" rtlCol="0" anchor="ctr"/>
           <a:lstStyle/>
           <a:p>
-            <a:pPr indent="0" marL="0">
+            <a:pPr marL="0" indent="0">
               <a:buNone/>
             </a:pPr>
             <a:r>
@@ -9430,7 +9187,7 @@
           <a:bodyPr wrap="square" lIns="0" tIns="0" rIns="0" bIns="0" rtlCol="0" anchor="ctr"/>
           <a:lstStyle/>
           <a:p>
-            <a:pPr algn="ctr" indent="0" marL="0">
+            <a:pPr marL="0" indent="0" algn="ctr">
               <a:buNone/>
             </a:pPr>
             <a:r>
@@ -9496,7 +9253,7 @@
           <a:bodyPr wrap="square" lIns="0" tIns="0" rIns="0" bIns="0" rtlCol="0" anchor="ctr"/>
           <a:lstStyle/>
           <a:p>
-            <a:pPr algn="ctr" indent="0" marL="0">
+            <a:pPr marL="0" indent="0" algn="ctr">
               <a:buNone/>
             </a:pPr>
             <a:r>
@@ -9530,6 +9287,7 @@
         <a:solidFill>
           <a:srgbClr val="FAFAF7"/>
         </a:solidFill>
+        <a:effectLst/>
       </p:bgPr>
     </p:bg>
     <p:spTree>
@@ -9567,7 +9325,7 @@
           <a:bodyPr wrap="square" lIns="0" tIns="0" rIns="0" bIns="0" rtlCol="0" anchor="ctr"/>
           <a:lstStyle/>
           <a:p>
-            <a:pPr indent="0" marL="0">
+            <a:pPr marL="0" indent="0">
               <a:buNone/>
             </a:pPr>
             <a:r>
@@ -9629,7 +9387,7 @@
           <a:bodyPr wrap="square" lIns="0" tIns="0" rIns="0" bIns="0" rtlCol="0" anchor="ctr"/>
           <a:lstStyle/>
           <a:p>
-            <a:pPr algn="r" indent="0" marL="0">
+            <a:pPr marL="0" indent="0" algn="r">
               <a:buNone/>
             </a:pPr>
             <a:r>
@@ -9726,7 +9484,7 @@
           <a:bodyPr wrap="square" lIns="0" tIns="0" rIns="0" bIns="0" rtlCol="0" anchor="ctr"/>
           <a:lstStyle/>
           <a:p>
-            <a:pPr indent="0" marL="0">
+            <a:pPr marL="0" indent="0">
               <a:buNone/>
             </a:pPr>
             <a:r>
@@ -9765,7 +9523,7 @@
           <a:bodyPr wrap="square" lIns="0" tIns="0" rIns="0" bIns="0" rtlCol="0" anchor="ctr"/>
           <a:lstStyle/>
           <a:p>
-            <a:pPr indent="0" marL="0">
+            <a:pPr marL="0" indent="0">
               <a:buNone/>
             </a:pPr>
             <a:r>
@@ -9856,7 +9614,7 @@
           <a:bodyPr wrap="square" lIns="0" tIns="0" rIns="0" bIns="0" rtlCol="0" anchor="ctr"/>
           <a:lstStyle/>
           <a:p>
-            <a:pPr indent="0" marL="0">
+            <a:pPr marL="0" indent="0">
               <a:buNone/>
             </a:pPr>
             <a:r>
@@ -9922,7 +9680,7 @@
           <a:bodyPr wrap="square" lIns="0" tIns="0" rIns="0" bIns="0" rtlCol="0" anchor="ctr"/>
           <a:lstStyle/>
           <a:p>
-            <a:pPr algn="l" indent="0" marL="0">
+            <a:pPr marL="0" indent="0" algn="l">
               <a:buNone/>
             </a:pPr>
             <a:r>
@@ -9988,7 +9746,7 @@
           <a:bodyPr wrap="square" lIns="0" tIns="0" rIns="0" bIns="0" rtlCol="0" anchor="ctr"/>
           <a:lstStyle/>
           <a:p>
-            <a:pPr algn="l" indent="0" marL="0">
+            <a:pPr marL="0" indent="0" algn="l">
               <a:buNone/>
             </a:pPr>
             <a:r>
@@ -10054,7 +9812,7 @@
           <a:bodyPr wrap="square" lIns="0" tIns="0" rIns="0" bIns="0" rtlCol="0" anchor="ctr"/>
           <a:lstStyle/>
           <a:p>
-            <a:pPr algn="l" indent="0" marL="0">
+            <a:pPr marL="0" indent="0" algn="l">
               <a:buNone/>
             </a:pPr>
             <a:r>
@@ -10120,7 +9878,7 @@
           <a:bodyPr wrap="square" lIns="0" tIns="0" rIns="0" bIns="0" rtlCol="0" anchor="ctr"/>
           <a:lstStyle/>
           <a:p>
-            <a:pPr algn="l" indent="0" marL="0">
+            <a:pPr marL="0" indent="0" algn="l">
               <a:buNone/>
             </a:pPr>
             <a:r>
@@ -10186,7 +9944,7 @@
           <a:bodyPr wrap="square" lIns="0" tIns="0" rIns="0" bIns="0" rtlCol="0" anchor="ctr"/>
           <a:lstStyle/>
           <a:p>
-            <a:pPr algn="l" indent="0" marL="0">
+            <a:pPr marL="0" indent="0" algn="l">
               <a:buNone/>
             </a:pPr>
             <a:r>
@@ -10277,7 +10035,7 @@
           <a:bodyPr wrap="square" lIns="0" tIns="0" rIns="0" bIns="0" rtlCol="0" anchor="ctr"/>
           <a:lstStyle/>
           <a:p>
-            <a:pPr indent="0" marL="0">
+            <a:pPr marL="0" indent="0">
               <a:buNone/>
             </a:pPr>
             <a:r>
@@ -10343,7 +10101,7 @@
           <a:bodyPr wrap="square" lIns="0" tIns="0" rIns="0" bIns="0" rtlCol="0" anchor="ctr"/>
           <a:lstStyle/>
           <a:p>
-            <a:pPr algn="l" indent="0" marL="0">
+            <a:pPr marL="0" indent="0" algn="l">
               <a:buNone/>
             </a:pPr>
             <a:r>
@@ -10409,7 +10167,7 @@
           <a:bodyPr wrap="square" lIns="0" tIns="0" rIns="0" bIns="0" rtlCol="0" anchor="ctr"/>
           <a:lstStyle/>
           <a:p>
-            <a:pPr algn="l" indent="0" marL="0">
+            <a:pPr marL="0" indent="0" algn="l">
               <a:buNone/>
             </a:pPr>
             <a:r>
@@ -10475,7 +10233,7 @@
           <a:bodyPr wrap="square" lIns="0" tIns="0" rIns="0" bIns="0" rtlCol="0" anchor="ctr"/>
           <a:lstStyle/>
           <a:p>
-            <a:pPr algn="l" indent="0" marL="0">
+            <a:pPr marL="0" indent="0" algn="l">
               <a:buNone/>
             </a:pPr>
             <a:r>
@@ -10541,7 +10299,7 @@
           <a:bodyPr wrap="square" lIns="0" tIns="0" rIns="0" bIns="0" rtlCol="0" anchor="ctr"/>
           <a:lstStyle/>
           <a:p>
-            <a:pPr algn="l" indent="0" marL="0">
+            <a:pPr marL="0" indent="0" algn="l">
               <a:buNone/>
             </a:pPr>
             <a:r>
@@ -10607,7 +10365,7 @@
           <a:bodyPr wrap="square" lIns="0" tIns="0" rIns="0" bIns="0" rtlCol="0" anchor="ctr"/>
           <a:lstStyle/>
           <a:p>
-            <a:pPr algn="l" indent="0" marL="0">
+            <a:pPr marL="0" indent="0" algn="l">
               <a:buNone/>
             </a:pPr>
             <a:r>
@@ -10673,7 +10431,7 @@
           <a:bodyPr wrap="square" lIns="0" tIns="0" rIns="0" bIns="0" rtlCol="0" anchor="ctr"/>
           <a:lstStyle/>
           <a:p>
-            <a:pPr algn="ctr" indent="0" marL="0">
+            <a:pPr marL="0" indent="0" algn="ctr">
               <a:buNone/>
             </a:pPr>
             <a:r>
@@ -10739,7 +10497,7 @@
           <a:bodyPr wrap="square" lIns="0" tIns="0" rIns="0" bIns="0" rtlCol="0" anchor="ctr"/>
           <a:lstStyle/>
           <a:p>
-            <a:pPr algn="ctr" indent="0" marL="0">
+            <a:pPr marL="0" indent="0" algn="ctr">
               <a:buNone/>
             </a:pPr>
             <a:r>
@@ -10805,7 +10563,7 @@
           <a:bodyPr wrap="square" lIns="0" tIns="0" rIns="0" bIns="0" rtlCol="0" anchor="ctr"/>
           <a:lstStyle/>
           <a:p>
-            <a:pPr algn="ctr" indent="0" marL="0">
+            <a:pPr marL="0" indent="0" algn="ctr">
               <a:buNone/>
             </a:pPr>
             <a:r>
@@ -10839,6 +10597,7 @@
         <a:solidFill>
           <a:srgbClr val="FAFAF7"/>
         </a:solidFill>
+        <a:effectLst/>
       </p:bgPr>
     </p:bg>
     <p:spTree>
@@ -10876,7 +10635,7 @@
           <a:bodyPr wrap="square" lIns="0" tIns="0" rIns="0" bIns="0" rtlCol="0" anchor="ctr"/>
           <a:lstStyle/>
           <a:p>
-            <a:pPr indent="0" marL="0">
+            <a:pPr marL="0" indent="0">
               <a:buNone/>
             </a:pPr>
             <a:r>
@@ -10938,7 +10697,7 @@
           <a:bodyPr wrap="square" lIns="0" tIns="0" rIns="0" bIns="0" rtlCol="0" anchor="ctr"/>
           <a:lstStyle/>
           <a:p>
-            <a:pPr algn="r" indent="0" marL="0">
+            <a:pPr marL="0" indent="0" algn="r">
               <a:buNone/>
             </a:pPr>
             <a:r>
@@ -11035,7 +10794,7 @@
           <a:bodyPr wrap="square" lIns="0" tIns="0" rIns="0" bIns="0" rtlCol="0" anchor="ctr"/>
           <a:lstStyle/>
           <a:p>
-            <a:pPr indent="0" marL="0">
+            <a:pPr marL="0" indent="0">
               <a:buNone/>
             </a:pPr>
             <a:r>
@@ -11074,7 +10833,7 @@
           <a:bodyPr wrap="square" lIns="0" tIns="0" rIns="0" bIns="0" rtlCol="0" anchor="ctr"/>
           <a:lstStyle/>
           <a:p>
-            <a:pPr indent="0" marL="0">
+            <a:pPr marL="0" indent="0">
               <a:buNone/>
             </a:pPr>
             <a:r>
@@ -11140,7 +10899,7 @@
           <a:bodyPr wrap="square" lIns="0" tIns="0" rIns="0" bIns="0" rtlCol="0" anchor="ctr"/>
           <a:lstStyle/>
           <a:p>
-            <a:pPr algn="ctr" indent="0" marL="0">
+            <a:pPr marL="0" indent="0" algn="ctr">
               <a:buNone/>
             </a:pPr>
             <a:r>
@@ -11179,7 +10938,7 @@
           <a:bodyPr wrap="square" lIns="0" tIns="0" rIns="0" bIns="0" rtlCol="0" anchor="ctr"/>
           <a:lstStyle/>
           <a:p>
-            <a:pPr indent="0" marL="0">
+            <a:pPr marL="0" indent="0">
               <a:buNone/>
             </a:pPr>
             <a:r>
@@ -11245,7 +11004,7 @@
           <a:bodyPr wrap="square" lIns="0" tIns="0" rIns="0" bIns="0" rtlCol="0" anchor="ctr"/>
           <a:lstStyle/>
           <a:p>
-            <a:pPr algn="ctr" indent="0" marL="0">
+            <a:pPr marL="0" indent="0" algn="ctr">
               <a:buNone/>
             </a:pPr>
             <a:r>
@@ -11284,7 +11043,7 @@
           <a:bodyPr wrap="square" lIns="0" tIns="0" rIns="0" bIns="0" rtlCol="0" anchor="ctr"/>
           <a:lstStyle/>
           <a:p>
-            <a:pPr indent="0" marL="0">
+            <a:pPr marL="0" indent="0">
               <a:buNone/>
             </a:pPr>
             <a:r>
@@ -11350,7 +11109,7 @@
           <a:bodyPr wrap="square" lIns="0" tIns="0" rIns="0" bIns="0" rtlCol="0" anchor="ctr"/>
           <a:lstStyle/>
           <a:p>
-            <a:pPr algn="ctr" indent="0" marL="0">
+            <a:pPr marL="0" indent="0" algn="ctr">
               <a:buNone/>
             </a:pPr>
             <a:r>
@@ -11389,7 +11148,7 @@
           <a:bodyPr wrap="square" lIns="0" tIns="0" rIns="0" bIns="0" rtlCol="0" anchor="ctr"/>
           <a:lstStyle/>
           <a:p>
-            <a:pPr indent="0" marL="0">
+            <a:pPr marL="0" indent="0">
               <a:buNone/>
             </a:pPr>
             <a:r>
@@ -11455,7 +11214,7 @@
           <a:bodyPr wrap="square" lIns="0" tIns="0" rIns="0" bIns="0" rtlCol="0" anchor="ctr"/>
           <a:lstStyle/>
           <a:p>
-            <a:pPr algn="ctr" indent="0" marL="0">
+            <a:pPr marL="0" indent="0" algn="ctr">
               <a:buNone/>
             </a:pPr>
             <a:r>
@@ -11470,45 +11229,6 @@
               <a:t>The right reimbursement design can turn clinical interest into operational adoption.</a:t>
             </a:r>
             <a:endParaRPr lang="en-US" sz="1580" dirty="0"/>
-          </a:p>
-        </p:txBody>
-      </p:sp>
-      <p:sp>
-        <p:nvSpPr>
-          <p:cNvPr id="20" name="Text 18"/>
-          <p:cNvSpPr/>
-          <p:nvPr/>
-        </p:nvSpPr>
-        <p:spPr>
-          <a:xfrm>
-            <a:off x="502920" y="5742432"/>
-            <a:ext cx="4389120" cy="146304"/>
-          </a:xfrm>
-          <a:prstGeom prst="rect">
-            <a:avLst/>
-          </a:prstGeom>
-          <a:noFill/>
-          <a:ln/>
-        </p:spPr>
-        <p:txBody>
-          <a:bodyPr wrap="square" lIns="0" tIns="0" rIns="0" bIns="0" rtlCol="0" anchor="ctr"/>
-          <a:lstStyle/>
-          <a:p>
-            <a:pPr indent="0" marL="0">
-              <a:buNone/>
-            </a:pPr>
-            <a:r>
-              <a:rPr lang="en-US" sz="1000" i="1" dirty="0">
-                <a:solidFill>
-                  <a:srgbClr val="6B706A"/>
-                </a:solidFill>
-                <a:latin typeface="Arial" pitchFamily="34" charset="0"/>
-                <a:ea typeface="Arial" pitchFamily="34" charset="-122"/>
-                <a:cs typeface="Arial" pitchFamily="34" charset="-120"/>
-              </a:rPr>
-              <a:t>Deck built from the concept brief only; no external facts added.</a:t>
-            </a:r>
-            <a:endParaRPr lang="en-US" sz="1000" dirty="0"/>
           </a:p>
         </p:txBody>
       </p:sp>
@@ -11813,4 +11533,299 @@
     </a:ext>
   </a:extLst>
 </a:theme>
+</file>
+
+<file path=ppt/theme/theme2.xml><?xml version="1.0" encoding="utf-8"?>
+<a:theme xmlns:a="http://schemas.openxmlformats.org/drawingml/2006/main" name="Office Theme">
+  <a:themeElements>
+    <a:clrScheme name="Office">
+      <a:dk1>
+        <a:sysClr val="windowText" lastClr="000000"/>
+      </a:dk1>
+      <a:lt1>
+        <a:sysClr val="window" lastClr="FFFFFF"/>
+      </a:lt1>
+      <a:dk2>
+        <a:srgbClr val="44546A"/>
+      </a:dk2>
+      <a:lt2>
+        <a:srgbClr val="E7E6E6"/>
+      </a:lt2>
+      <a:accent1>
+        <a:srgbClr val="4472C4"/>
+      </a:accent1>
+      <a:accent2>
+        <a:srgbClr val="ED7D31"/>
+      </a:accent2>
+      <a:accent3>
+        <a:srgbClr val="A5A5A5"/>
+      </a:accent3>
+      <a:accent4>
+        <a:srgbClr val="FFC000"/>
+      </a:accent4>
+      <a:accent5>
+        <a:srgbClr val="5B9BD5"/>
+      </a:accent5>
+      <a:accent6>
+        <a:srgbClr val="70AD47"/>
+      </a:accent6>
+      <a:hlink>
+        <a:srgbClr val="0563C1"/>
+      </a:hlink>
+      <a:folHlink>
+        <a:srgbClr val="954F72"/>
+      </a:folHlink>
+    </a:clrScheme>
+    <a:fontScheme name="Office">
+      <a:majorFont>
+        <a:latin typeface="Calibri Light" panose="020F0302020204030204"/>
+        <a:ea typeface=""/>
+        <a:cs typeface=""/>
+        <a:font script="Jpan" typeface="游ゴシック Light"/>
+        <a:font script="Hang" typeface="맑은 고딕"/>
+        <a:font script="Hans" typeface="等线 Light"/>
+        <a:font script="Hant" typeface="新細明體"/>
+        <a:font script="Arab" typeface="Times New Roman"/>
+        <a:font script="Hebr" typeface="Times New Roman"/>
+        <a:font script="Thai" typeface="Angsana New"/>
+        <a:font script="Ethi" typeface="Nyala"/>
+        <a:font script="Beng" typeface="Vrinda"/>
+        <a:font script="Gujr" typeface="Shruti"/>
+        <a:font script="Khmr" typeface="MoolBoran"/>
+        <a:font script="Knda" typeface="Tunga"/>
+        <a:font script="Guru" typeface="Raavi"/>
+        <a:font script="Cans" typeface="Euphemia"/>
+        <a:font script="Cher" typeface="Plantagenet Cherokee"/>
+        <a:font script="Yiii" typeface="Microsoft Yi Baiti"/>
+        <a:font script="Tibt" typeface="Microsoft Himalaya"/>
+        <a:font script="Thaa" typeface="MV Boli"/>
+        <a:font script="Deva" typeface="Mangal"/>
+        <a:font script="Telu" typeface="Gautami"/>
+        <a:font script="Taml" typeface="Latha"/>
+        <a:font script="Syrc" typeface="Estrangelo Edessa"/>
+        <a:font script="Orya" typeface="Kalinga"/>
+        <a:font script="Mlym" typeface="Kartika"/>
+        <a:font script="Laoo" typeface="DokChampa"/>
+        <a:font script="Sinh" typeface="Iskoola Pota"/>
+        <a:font script="Mong" typeface="Mongolian Baiti"/>
+        <a:font script="Viet" typeface="Times New Roman"/>
+        <a:font script="Uigh" typeface="Microsoft Uighur"/>
+        <a:font script="Geor" typeface="Sylfaen"/>
+        <a:font script="Armn" typeface="Arial"/>
+        <a:font script="Bugi" typeface="Leelawadee UI"/>
+        <a:font script="Bopo" typeface="Microsoft JhengHei"/>
+        <a:font script="Java" typeface="Javanese Text"/>
+        <a:font script="Lisu" typeface="Segoe UI"/>
+        <a:font script="Mymr" typeface="Myanmar Text"/>
+        <a:font script="Nkoo" typeface="Ebrima"/>
+        <a:font script="Olck" typeface="Nirmala UI"/>
+        <a:font script="Osma" typeface="Ebrima"/>
+        <a:font script="Phag" typeface="Phagspa"/>
+        <a:font script="Syrn" typeface="Estrangelo Edessa"/>
+        <a:font script="Syrj" typeface="Estrangelo Edessa"/>
+        <a:font script="Syre" typeface="Estrangelo Edessa"/>
+        <a:font script="Sora" typeface="Nirmala UI"/>
+        <a:font script="Tale" typeface="Microsoft Tai Le"/>
+        <a:font script="Talu" typeface="Microsoft New Tai Lue"/>
+        <a:font script="Tfng" typeface="Ebrima"/>
+      </a:majorFont>
+      <a:minorFont>
+        <a:latin typeface="Calibri" panose="020F0502020204030204"/>
+        <a:ea typeface=""/>
+        <a:cs typeface=""/>
+        <a:font script="Jpan" typeface="游ゴシック"/>
+        <a:font script="Hang" typeface="맑은 고딕"/>
+        <a:font script="Hans" typeface="等线"/>
+        <a:font script="Hant" typeface="新細明體"/>
+        <a:font script="Arab" typeface="Arial"/>
+        <a:font script="Hebr" typeface="Arial"/>
+        <a:font script="Thai" typeface="Cordia New"/>
+        <a:font script="Ethi" typeface="Nyala"/>
+        <a:font script="Beng" typeface="Vrinda"/>
+        <a:font script="Gujr" typeface="Shruti"/>
+        <a:font script="Khmr" typeface="DaunPenh"/>
+        <a:font script="Knda" typeface="Tunga"/>
+        <a:font script="Guru" typeface="Raavi"/>
+        <a:font script="Cans" typeface="Euphemia"/>
+        <a:font script="Cher" typeface="Plantagenet Cherokee"/>
+        <a:font script="Yiii" typeface="Microsoft Yi Baiti"/>
+        <a:font script="Tibt" typeface="Microsoft Himalaya"/>
+        <a:font script="Thaa" typeface="MV Boli"/>
+        <a:font script="Deva" typeface="Mangal"/>
+        <a:font script="Telu" typeface="Gautami"/>
+        <a:font script="Taml" typeface="Latha"/>
+        <a:font script="Syrc" typeface="Estrangelo Edessa"/>
+        <a:font script="Orya" typeface="Kalinga"/>
+        <a:font script="Mlym" typeface="Kartika"/>
+        <a:font script="Laoo" typeface="DokChampa"/>
+        <a:font script="Sinh" typeface="Iskoola Pota"/>
+        <a:font script="Mong" typeface="Mongolian Baiti"/>
+        <a:font script="Viet" typeface="Arial"/>
+        <a:font script="Uigh" typeface="Microsoft Uighur"/>
+        <a:font script="Geor" typeface="Sylfaen"/>
+        <a:font script="Armn" typeface="Arial"/>
+        <a:font script="Bugi" typeface="Leelawadee UI"/>
+        <a:font script="Bopo" typeface="Microsoft JhengHei"/>
+        <a:font script="Java" typeface="Javanese Text"/>
+        <a:font script="Lisu" typeface="Segoe UI"/>
+        <a:font script="Mymr" typeface="Myanmar Text"/>
+        <a:font script="Nkoo" typeface="Ebrima"/>
+        <a:font script="Olck" typeface="Nirmala UI"/>
+        <a:font script="Osma" typeface="Ebrima"/>
+        <a:font script="Phag" typeface="Phagspa"/>
+        <a:font script="Syrn" typeface="Estrangelo Edessa"/>
+        <a:font script="Syrj" typeface="Estrangelo Edessa"/>
+        <a:font script="Syre" typeface="Estrangelo Edessa"/>
+        <a:font script="Sora" typeface="Nirmala UI"/>
+        <a:font script="Tale" typeface="Microsoft Tai Le"/>
+        <a:font script="Talu" typeface="Microsoft New Tai Lue"/>
+        <a:font script="Tfng" typeface="Ebrima"/>
+      </a:minorFont>
+    </a:fontScheme>
+    <a:fmtScheme name="Office">
+      <a:fillStyleLst>
+        <a:solidFill>
+          <a:schemeClr val="phClr"/>
+        </a:solidFill>
+        <a:gradFill rotWithShape="1">
+          <a:gsLst>
+            <a:gs pos="0">
+              <a:schemeClr val="phClr">
+                <a:lumMod val="110000"/>
+                <a:satMod val="105000"/>
+                <a:tint val="67000"/>
+              </a:schemeClr>
+            </a:gs>
+            <a:gs pos="50000">
+              <a:schemeClr val="phClr">
+                <a:lumMod val="105000"/>
+                <a:satMod val="103000"/>
+                <a:tint val="73000"/>
+              </a:schemeClr>
+            </a:gs>
+            <a:gs pos="100000">
+              <a:schemeClr val="phClr">
+                <a:lumMod val="105000"/>
+                <a:satMod val="109000"/>
+                <a:tint val="81000"/>
+              </a:schemeClr>
+            </a:gs>
+          </a:gsLst>
+          <a:lin ang="5400000" scaled="0"/>
+        </a:gradFill>
+        <a:gradFill rotWithShape="1">
+          <a:gsLst>
+            <a:gs pos="0">
+              <a:schemeClr val="phClr">
+                <a:satMod val="103000"/>
+                <a:lumMod val="102000"/>
+                <a:tint val="94000"/>
+              </a:schemeClr>
+            </a:gs>
+            <a:gs pos="50000">
+              <a:schemeClr val="phClr">
+                <a:satMod val="110000"/>
+                <a:lumMod val="100000"/>
+                <a:shade val="100000"/>
+              </a:schemeClr>
+            </a:gs>
+            <a:gs pos="100000">
+              <a:schemeClr val="phClr">
+                <a:lumMod val="99000"/>
+                <a:satMod val="120000"/>
+                <a:shade val="78000"/>
+              </a:schemeClr>
+            </a:gs>
+          </a:gsLst>
+          <a:lin ang="5400000" scaled="0"/>
+        </a:gradFill>
+      </a:fillStyleLst>
+      <a:lnStyleLst>
+        <a:ln w="6350" cap="flat" cmpd="sng" algn="ctr">
+          <a:solidFill>
+            <a:schemeClr val="phClr"/>
+          </a:solidFill>
+          <a:prstDash val="solid"/>
+          <a:miter lim="800000"/>
+        </a:ln>
+        <a:ln w="12700" cap="flat" cmpd="sng" algn="ctr">
+          <a:solidFill>
+            <a:schemeClr val="phClr"/>
+          </a:solidFill>
+          <a:prstDash val="solid"/>
+          <a:miter lim="800000"/>
+        </a:ln>
+        <a:ln w="19050" cap="flat" cmpd="sng" algn="ctr">
+          <a:solidFill>
+            <a:schemeClr val="phClr"/>
+          </a:solidFill>
+          <a:prstDash val="solid"/>
+          <a:miter lim="800000"/>
+        </a:ln>
+      </a:lnStyleLst>
+      <a:effectStyleLst>
+        <a:effectStyle>
+          <a:effectLst/>
+        </a:effectStyle>
+        <a:effectStyle>
+          <a:effectLst/>
+        </a:effectStyle>
+        <a:effectStyle>
+          <a:effectLst>
+            <a:outerShdw blurRad="57150" dist="19050" dir="5400000" algn="ctr" rotWithShape="0">
+              <a:srgbClr val="000000">
+                <a:alpha val="63000"/>
+              </a:srgbClr>
+            </a:outerShdw>
+          </a:effectLst>
+        </a:effectStyle>
+      </a:effectStyleLst>
+      <a:bgFillStyleLst>
+        <a:solidFill>
+          <a:schemeClr val="phClr"/>
+        </a:solidFill>
+        <a:solidFill>
+          <a:schemeClr val="phClr">
+            <a:tint val="95000"/>
+            <a:satMod val="170000"/>
+          </a:schemeClr>
+        </a:solidFill>
+        <a:gradFill rotWithShape="1">
+          <a:gsLst>
+            <a:gs pos="0">
+              <a:schemeClr val="phClr">
+                <a:tint val="93000"/>
+                <a:satMod val="150000"/>
+                <a:shade val="98000"/>
+                <a:lumMod val="102000"/>
+              </a:schemeClr>
+            </a:gs>
+            <a:gs pos="50000">
+              <a:schemeClr val="phClr">
+                <a:tint val="98000"/>
+                <a:satMod val="130000"/>
+                <a:shade val="90000"/>
+                <a:lumMod val="103000"/>
+              </a:schemeClr>
+            </a:gs>
+            <a:gs pos="100000">
+              <a:schemeClr val="phClr">
+                <a:shade val="63000"/>
+                <a:satMod val="120000"/>
+              </a:schemeClr>
+            </a:gs>
+          </a:gsLst>
+          <a:lin ang="5400000" scaled="0"/>
+        </a:gradFill>
+      </a:bgFillStyleLst>
+    </a:fmtScheme>
+  </a:themeElements>
+  <a:objectDefaults/>
+  <a:extraClrSchemeLst/>
+  <a:extLst>
+    <a:ext uri="{05A4C25C-085E-4340-85A3-A5531E510DB2}">
+      <thm15:themeFamily xmlns:thm15="http://schemas.microsoft.com/office/thememl/2012/main" name="Office Theme" id="{62F939B6-93AF-4DB8-9C6B-D6C7DFDC589F}" vid="{4A3C46E8-61CC-4603-A589-7422A47A8E4A}"/>
+    </a:ext>
+  </a:extLst>
+</a:theme>
 </file>